--- a/slides/12-uncertainty-bias-lab.pptx
+++ b/slides/12-uncertainty-bias-lab.pptx
@@ -203,7 +203,7 @@
           <a:p>
             <a:fld id="{2CD22518-F7FE-2E40-9C60-793856882CE6}" type="datetimeFigureOut">
               <a:rPr lang="en-US" smtClean="0"/>
-              <a:t>2/9/26</a:t>
+              <a:t>2/11/26</a:t>
             </a:fld>
             <a:endParaRPr lang="en-US"/>
           </a:p>
@@ -1197,7 +1197,7 @@
             <a:fld id="{B61BEF0D-F0BB-DE4B-95CE-6DB70DBA9567}" type="datetimeFigureOut">
               <a:rPr lang="en-US" smtClean="0"/>
               <a:pPr/>
-              <a:t>2/9/26</a:t>
+              <a:t>2/11/26</a:t>
             </a:fld>
             <a:endParaRPr lang="en-US" dirty="0"/>
           </a:p>
@@ -1461,7 +1461,7 @@
             <a:fld id="{B61BEF0D-F0BB-DE4B-95CE-6DB70DBA9567}" type="datetimeFigureOut">
               <a:rPr lang="en-US" smtClean="0"/>
               <a:pPr/>
-              <a:t>2/9/26</a:t>
+              <a:t>2/11/26</a:t>
             </a:fld>
             <a:endParaRPr lang="en-US" dirty="0"/>
           </a:p>
@@ -1698,7 +1698,7 @@
             <a:fld id="{B61BEF0D-F0BB-DE4B-95CE-6DB70DBA9567}" type="datetimeFigureOut">
               <a:rPr lang="en-US" smtClean="0"/>
               <a:pPr/>
-              <a:t>2/9/26</a:t>
+              <a:t>2/11/26</a:t>
             </a:fld>
             <a:endParaRPr lang="en-US" dirty="0"/>
           </a:p>
@@ -1947,7 +1947,7 @@
             <a:fld id="{B61BEF0D-F0BB-DE4B-95CE-6DB70DBA9567}" type="datetimeFigureOut">
               <a:rPr lang="en-US" smtClean="0"/>
               <a:pPr/>
-              <a:t>2/9/26</a:t>
+              <a:t>2/11/26</a:t>
             </a:fld>
             <a:endParaRPr lang="en-US" dirty="0"/>
           </a:p>
@@ -2256,7 +2256,7 @@
             <a:fld id="{B61BEF0D-F0BB-DE4B-95CE-6DB70DBA9567}" type="datetimeFigureOut">
               <a:rPr lang="en-US" smtClean="0"/>
               <a:pPr/>
-              <a:t>2/9/26</a:t>
+              <a:t>2/11/26</a:t>
             </a:fld>
             <a:endParaRPr lang="en-US" dirty="0"/>
           </a:p>
@@ -2560,7 +2560,7 @@
             <a:fld id="{B61BEF0D-F0BB-DE4B-95CE-6DB70DBA9567}" type="datetimeFigureOut">
               <a:rPr lang="en-US" smtClean="0"/>
               <a:pPr/>
-              <a:t>2/9/26</a:t>
+              <a:t>2/11/26</a:t>
             </a:fld>
             <a:endParaRPr lang="en-US" dirty="0"/>
           </a:p>
@@ -2984,7 +2984,7 @@
             <a:fld id="{B61BEF0D-F0BB-DE4B-95CE-6DB70DBA9567}" type="datetimeFigureOut">
               <a:rPr lang="en-US" smtClean="0"/>
               <a:pPr/>
-              <a:t>2/9/26</a:t>
+              <a:t>2/11/26</a:t>
             </a:fld>
             <a:endParaRPr lang="en-US" dirty="0"/>
           </a:p>
@@ -3081,7 +3081,7 @@
             <a:fld id="{B61BEF0D-F0BB-DE4B-95CE-6DB70DBA9567}" type="datetimeFigureOut">
               <a:rPr lang="en-US" smtClean="0"/>
               <a:pPr/>
-              <a:t>2/9/26</a:t>
+              <a:t>2/11/26</a:t>
             </a:fld>
             <a:endParaRPr lang="en-US" dirty="0"/>
           </a:p>
@@ -3245,7 +3245,7 @@
             <a:fld id="{B61BEF0D-F0BB-DE4B-95CE-6DB70DBA9567}" type="datetimeFigureOut">
               <a:rPr lang="en-US" smtClean="0"/>
               <a:pPr/>
-              <a:t>2/9/26</a:t>
+              <a:t>2/11/26</a:t>
             </a:fld>
             <a:endParaRPr lang="en-US" dirty="0"/>
           </a:p>
@@ -3625,7 +3625,7 @@
             <a:fld id="{B61BEF0D-F0BB-DE4B-95CE-6DB70DBA9567}" type="datetimeFigureOut">
               <a:rPr lang="en-US" smtClean="0"/>
               <a:pPr/>
-              <a:t>2/9/26</a:t>
+              <a:t>2/11/26</a:t>
             </a:fld>
             <a:endParaRPr lang="en-US" dirty="0"/>
           </a:p>
@@ -3916,7 +3916,7 @@
             <a:fld id="{B61BEF0D-F0BB-DE4B-95CE-6DB70DBA9567}" type="datetimeFigureOut">
               <a:rPr lang="en-US" smtClean="0"/>
               <a:pPr/>
-              <a:t>2/9/26</a:t>
+              <a:t>2/11/26</a:t>
             </a:fld>
             <a:endParaRPr lang="en-US" dirty="0"/>
           </a:p>
@@ -4129,7 +4129,7 @@
             <a:fld id="{B61BEF0D-F0BB-DE4B-95CE-6DB70DBA9567}" type="datetimeFigureOut">
               <a:rPr lang="en-US" smtClean="0"/>
               <a:pPr/>
-              <a:t>2/9/26</a:t>
+              <a:t>2/11/26</a:t>
             </a:fld>
             <a:endParaRPr lang="en-US" dirty="0"/>
           </a:p>
@@ -6395,13 +6395,54 @@
         </p:spPr>
         <p:txBody>
           <a:bodyPr anchor="t">
-            <a:normAutofit/>
+            <a:normAutofit lnSpcReduction="10000"/>
           </a:bodyPr>
           <a:lstStyle/>
           <a:p>
             <a:r>
               <a:rPr lang="en-US" sz="2200" dirty="0"/>
               <a:t>In the starter code for today’s lab, you will find a coordinated multiple view (CMV) visualization of the palmer’s penguins dataset</a:t>
+            </a:r>
+          </a:p>
+          <a:p>
+            <a:r>
+              <a:rPr lang="en-US" sz="2200" dirty="0"/>
+              <a:t>On the left scatterplot, there is a brush that allows the user to select a subset of points</a:t>
+            </a:r>
+          </a:p>
+          <a:p>
+            <a:r>
+              <a:rPr lang="en-US" sz="2200" dirty="0"/>
+              <a:t>Selected points are highlighted in red on both plots</a:t>
+            </a:r>
+          </a:p>
+          <a:p>
+            <a:endParaRPr lang="en-US" sz="2200" dirty="0"/>
+          </a:p>
+          <a:p>
+            <a:r>
+              <a:rPr lang="en-US" sz="2200" dirty="0"/>
+              <a:t>Modify the starter code such that:</a:t>
+            </a:r>
+          </a:p>
+          <a:p>
+            <a:pPr marL="457200" indent="-457200">
+              <a:buFont typeface="+mj-lt"/>
+              <a:buAutoNum type="arabicPeriod"/>
+            </a:pPr>
+            <a:r>
+              <a:rPr lang="en-US" sz="2200" dirty="0"/>
+              <a:t>Interaction traces are shown. In other words, how can you keep track of and visualize which points have been selected previously?</a:t>
+            </a:r>
+          </a:p>
+          <a:p>
+            <a:pPr marL="457200" indent="-457200">
+              <a:buFont typeface="+mj-lt"/>
+              <a:buAutoNum type="arabicPeriod"/>
+            </a:pPr>
+            <a:r>
+              <a:rPr lang="en-US" sz="2200" dirty="0"/>
+              <a:t>Add a bar plot that shows number of each penguin species in a selection </a:t>
             </a:r>
           </a:p>
         </p:txBody>

--- a/slides/12-uncertainty-bias-lab.pptx
+++ b/slides/12-uncertainty-bias-lab.pptx
@@ -203,7 +203,7 @@
           <a:p>
             <a:fld id="{2CD22518-F7FE-2E40-9C60-793856882CE6}" type="datetimeFigureOut">
               <a:rPr lang="en-US" smtClean="0"/>
-              <a:t>2/11/26</a:t>
+              <a:t>3/12/26</a:t>
             </a:fld>
             <a:endParaRPr lang="en-US"/>
           </a:p>
@@ -1197,7 +1197,7 @@
             <a:fld id="{B61BEF0D-F0BB-DE4B-95CE-6DB70DBA9567}" type="datetimeFigureOut">
               <a:rPr lang="en-US" smtClean="0"/>
               <a:pPr/>
-              <a:t>2/11/26</a:t>
+              <a:t>3/12/26</a:t>
             </a:fld>
             <a:endParaRPr lang="en-US" dirty="0"/>
           </a:p>
@@ -1461,7 +1461,7 @@
             <a:fld id="{B61BEF0D-F0BB-DE4B-95CE-6DB70DBA9567}" type="datetimeFigureOut">
               <a:rPr lang="en-US" smtClean="0"/>
               <a:pPr/>
-              <a:t>2/11/26</a:t>
+              <a:t>3/12/26</a:t>
             </a:fld>
             <a:endParaRPr lang="en-US" dirty="0"/>
           </a:p>
@@ -1698,7 +1698,7 @@
             <a:fld id="{B61BEF0D-F0BB-DE4B-95CE-6DB70DBA9567}" type="datetimeFigureOut">
               <a:rPr lang="en-US" smtClean="0"/>
               <a:pPr/>
-              <a:t>2/11/26</a:t>
+              <a:t>3/12/26</a:t>
             </a:fld>
             <a:endParaRPr lang="en-US" dirty="0"/>
           </a:p>
@@ -1947,7 +1947,7 @@
             <a:fld id="{B61BEF0D-F0BB-DE4B-95CE-6DB70DBA9567}" type="datetimeFigureOut">
               <a:rPr lang="en-US" smtClean="0"/>
               <a:pPr/>
-              <a:t>2/11/26</a:t>
+              <a:t>3/12/26</a:t>
             </a:fld>
             <a:endParaRPr lang="en-US" dirty="0"/>
           </a:p>
@@ -2256,7 +2256,7 @@
             <a:fld id="{B61BEF0D-F0BB-DE4B-95CE-6DB70DBA9567}" type="datetimeFigureOut">
               <a:rPr lang="en-US" smtClean="0"/>
               <a:pPr/>
-              <a:t>2/11/26</a:t>
+              <a:t>3/12/26</a:t>
             </a:fld>
             <a:endParaRPr lang="en-US" dirty="0"/>
           </a:p>
@@ -2560,7 +2560,7 @@
             <a:fld id="{B61BEF0D-F0BB-DE4B-95CE-6DB70DBA9567}" type="datetimeFigureOut">
               <a:rPr lang="en-US" smtClean="0"/>
               <a:pPr/>
-              <a:t>2/11/26</a:t>
+              <a:t>3/12/26</a:t>
             </a:fld>
             <a:endParaRPr lang="en-US" dirty="0"/>
           </a:p>
@@ -2984,7 +2984,7 @@
             <a:fld id="{B61BEF0D-F0BB-DE4B-95CE-6DB70DBA9567}" type="datetimeFigureOut">
               <a:rPr lang="en-US" smtClean="0"/>
               <a:pPr/>
-              <a:t>2/11/26</a:t>
+              <a:t>3/12/26</a:t>
             </a:fld>
             <a:endParaRPr lang="en-US" dirty="0"/>
           </a:p>
@@ -3081,7 +3081,7 @@
             <a:fld id="{B61BEF0D-F0BB-DE4B-95CE-6DB70DBA9567}" type="datetimeFigureOut">
               <a:rPr lang="en-US" smtClean="0"/>
               <a:pPr/>
-              <a:t>2/11/26</a:t>
+              <a:t>3/12/26</a:t>
             </a:fld>
             <a:endParaRPr lang="en-US" dirty="0"/>
           </a:p>
@@ -3245,7 +3245,7 @@
             <a:fld id="{B61BEF0D-F0BB-DE4B-95CE-6DB70DBA9567}" type="datetimeFigureOut">
               <a:rPr lang="en-US" smtClean="0"/>
               <a:pPr/>
-              <a:t>2/11/26</a:t>
+              <a:t>3/12/26</a:t>
             </a:fld>
             <a:endParaRPr lang="en-US" dirty="0"/>
           </a:p>
@@ -3625,7 +3625,7 @@
             <a:fld id="{B61BEF0D-F0BB-DE4B-95CE-6DB70DBA9567}" type="datetimeFigureOut">
               <a:rPr lang="en-US" smtClean="0"/>
               <a:pPr/>
-              <a:t>2/11/26</a:t>
+              <a:t>3/12/26</a:t>
             </a:fld>
             <a:endParaRPr lang="en-US" dirty="0"/>
           </a:p>
@@ -3916,7 +3916,7 @@
             <a:fld id="{B61BEF0D-F0BB-DE4B-95CE-6DB70DBA9567}" type="datetimeFigureOut">
               <a:rPr lang="en-US" smtClean="0"/>
               <a:pPr/>
-              <a:t>2/11/26</a:t>
+              <a:t>3/12/26</a:t>
             </a:fld>
             <a:endParaRPr lang="en-US" dirty="0"/>
           </a:p>
@@ -4129,7 +4129,7 @@
             <a:fld id="{B61BEF0D-F0BB-DE4B-95CE-6DB70DBA9567}" type="datetimeFigureOut">
               <a:rPr lang="en-US" smtClean="0"/>
               <a:pPr/>
-              <a:t>2/11/26</a:t>
+              <a:t>3/12/26</a:t>
             </a:fld>
             <a:endParaRPr lang="en-US" dirty="0"/>
           </a:p>
@@ -4899,14 +4899,14 @@
           <a:p>
             <a:r>
               <a:rPr lang="en-US" sz="2400" dirty="0"/>
-              <a:t>Refresh: HOPs</a:t>
+              <a:t>Refresh: HOPS</a:t>
             </a:r>
           </a:p>
           <a:p>
             <a:pPr lvl="1"/>
             <a:r>
               <a:rPr lang="en-US" sz="2200" dirty="0"/>
-              <a:t>High-level review for HW </a:t>
+              <a:t>HOPS Algorithm</a:t>
             </a:r>
           </a:p>
           <a:p>
